--- a/docs/slides/Modulo 3/preview03_hkma.pptx
+++ b/docs/slides/Modulo 3/preview03_hkma.pptx
@@ -14,6 +14,8 @@
     <p:sldId id="262" r:id="rId8"/>
     <p:sldId id="263" r:id="rId9"/>
     <p:sldId id="264" r:id="rId10"/>
+    <p:sldId id="265" r:id="rId15"/>
+    <p:sldId id="266" r:id="rId16"/>
   </p:sldIdLst>
   <p:sldSz cx="12188825" cy="6858000"/>
   <p:notesSz cx="6858000" cy="9144000"/>
@@ -3288,6 +3290,1032 @@
             </a:pPr>
             <a:r>
               <a:t>El banco central de Hong Kong como miembro de la red</a:t>
+            </a:r>
+          </a:p>
+        </p:txBody>
+      </p:sp>
+    </p:spTree>
+  </p:cSld>
+  <p:clrMapOvr>
+    <a:masterClrMapping/>
+  </p:clrMapOvr>
+</p:sld>
+</file>
+
+<file path=ppt/slides/slide10.xml><?xml version="1.0" encoding="utf-8"?>
+<p:sld xmlns:a="http://schemas.openxmlformats.org/drawingml/2006/main" xmlns:p="http://schemas.openxmlformats.org/presentationml/2006/main" xmlns:r="http://schemas.openxmlformats.org/officeDocument/2006/relationships">
+  <p:cSld>
+    <p:spTree>
+      <p:nvGrpSpPr>
+        <p:cNvPr id="1" name=""/>
+        <p:cNvGrpSpPr/>
+        <p:nvPr/>
+      </p:nvGrpSpPr>
+      <p:grpSpPr/>
+      <p:sp>
+        <p:nvSpPr>
+          <p:cNvPr id="2" name="Rectangle 1"/>
+          <p:cNvSpPr/>
+          <p:nvPr/>
+        </p:nvSpPr>
+        <p:spPr>
+          <a:xfrm>
+            <a:off x="0" y="0"/>
+            <a:ext cx="12188952" cy="73152"/>
+          </a:xfrm>
+          <a:prstGeom prst="rect">
+            <a:avLst/>
+          </a:prstGeom>
+          <a:solidFill>
+            <a:srgbClr val="22627E"/>
+          </a:solidFill>
+          <a:ln>
+            <a:noFill/>
+          </a:ln>
+        </p:spPr>
+        <p:style>
+          <a:lnRef idx="1">
+            <a:schemeClr val="accent1"/>
+          </a:lnRef>
+          <a:fillRef idx="3">
+            <a:schemeClr val="accent1"/>
+          </a:fillRef>
+          <a:effectRef idx="2">
+            <a:schemeClr val="accent1"/>
+          </a:effectRef>
+          <a:fontRef idx="minor">
+            <a:schemeClr val="lt1"/>
+          </a:fontRef>
+        </p:style>
+        <p:txBody>
+          <a:bodyPr rtlCol="0" anchor="ctr"/>
+          <a:lstStyle/>
+          <a:p>
+            <a:pPr algn="ctr"/>
+          </a:p>
+        </p:txBody>
+      </p:sp>
+      <p:sp>
+        <p:nvSpPr>
+          <p:cNvPr id="3" name="TextBox 2"/>
+          <p:cNvSpPr txBox="1"/>
+          <p:nvPr/>
+        </p:nvSpPr>
+        <p:spPr>
+          <a:xfrm>
+            <a:off x="457200" y="274320"/>
+            <a:ext cx="10972800" cy="731520"/>
+          </a:xfrm>
+          <a:prstGeom prst="rect">
+            <a:avLst/>
+          </a:prstGeom>
+          <a:noFill/>
+        </p:spPr>
+        <p:txBody>
+          <a:bodyPr wrap="square"/>
+          <a:lstStyle/>
+          <a:p>
+            <a:pPr algn="l">
+              <a:defRPr sz="3200" b="1">
+                <a:solidFill>
+                  <a:srgbClr val="22627E"/>
+                </a:solidFill>
+                <a:latin typeface="Calibri"/>
+              </a:defRPr>
+            </a:pPr>
+            <a:r>
+              <a:t>Respuestas a las preguntas clave</a:t>
+            </a:r>
+          </a:p>
+        </p:txBody>
+      </p:sp>
+      <p:sp>
+        <p:nvSpPr>
+          <p:cNvPr id="4" name="Rectangle 3"/>
+          <p:cNvSpPr/>
+          <p:nvPr/>
+        </p:nvSpPr>
+        <p:spPr>
+          <a:xfrm>
+            <a:off x="457200" y="1051560"/>
+            <a:ext cx="10972800" cy="27432"/>
+          </a:xfrm>
+          <a:prstGeom prst="rect">
+            <a:avLst/>
+          </a:prstGeom>
+          <a:solidFill>
+            <a:srgbClr val="22627E"/>
+          </a:solidFill>
+          <a:ln>
+            <a:noFill/>
+          </a:ln>
+        </p:spPr>
+        <p:style>
+          <a:lnRef idx="1">
+            <a:schemeClr val="accent1"/>
+          </a:lnRef>
+          <a:fillRef idx="3">
+            <a:schemeClr val="accent1"/>
+          </a:fillRef>
+          <a:effectRef idx="2">
+            <a:schemeClr val="accent1"/>
+          </a:effectRef>
+          <a:fontRef idx="minor">
+            <a:schemeClr val="lt1"/>
+          </a:fontRef>
+        </p:style>
+        <p:txBody>
+          <a:bodyPr rtlCol="0" anchor="ctr"/>
+          <a:lstStyle/>
+          <a:p>
+            <a:pPr algn="ctr"/>
+          </a:p>
+        </p:txBody>
+      </p:sp>
+      <p:sp>
+        <p:nvSpPr>
+          <p:cNvPr id="5" name="TextBox 4"/>
+          <p:cNvSpPr txBox="1"/>
+          <p:nvPr/>
+        </p:nvSpPr>
+        <p:spPr>
+          <a:xfrm>
+            <a:off x="640080" y="1280160"/>
+            <a:ext cx="10515600" cy="5029200"/>
+          </a:xfrm>
+          <a:prstGeom prst="rect">
+            <a:avLst/>
+          </a:prstGeom>
+          <a:noFill/>
+        </p:spPr>
+        <p:txBody>
+          <a:bodyPr wrap="square">
+            <a:spAutoFit/>
+          </a:bodyPr>
+          <a:lstStyle/>
+          <a:p>
+            <a:pPr>
+              <a:spcAft>
+                <a:spcPts val="800"/>
+              </a:spcAft>
+              <a:defRPr sz="2000">
+                <a:solidFill>
+                  <a:srgbClr val="333333"/>
+                </a:solidFill>
+                <a:latin typeface="Calibri"/>
+              </a:defRPr>
+            </a:pPr>
+            <a:r>
+              <a:t>1. ¿Regulador endorsa o solo audita?</a:t>
+            </a:r>
+          </a:p>
+          <a:p>
+            <a:pPr lvl="1">
+              <a:spcAft>
+                <a:spcPts val="400"/>
+              </a:spcAft>
+              <a:defRPr sz="1700">
+                <a:solidFill>
+                  <a:srgbClr val="666666"/>
+                </a:solidFill>
+                <a:latin typeface="Calibri"/>
+              </a:defRPr>
+            </a:pPr>
+            <a:r>
+              <a:t>    Solo audita. El regulador NO endorsea transacciones normales.</a:t>
+            </a:r>
+          </a:p>
+          <a:p>
+            <a:pPr lvl="1">
+              <a:spcAft>
+                <a:spcPts val="400"/>
+              </a:spcAft>
+              <a:defRPr sz="1700">
+                <a:solidFill>
+                  <a:srgbClr val="666666"/>
+                </a:solidFill>
+                <a:latin typeface="Calibri"/>
+              </a:defRPr>
+            </a:pPr>
+            <a:r>
+              <a:t>    Evita que el regulador pueda alterar el flujo de negocio.</a:t>
+            </a:r>
+          </a:p>
+          <a:p>
+            <a:pPr lvl="1">
+              <a:spcAft>
+                <a:spcPts val="400"/>
+              </a:spcAft>
+              <a:defRPr sz="1700">
+                <a:solidFill>
+                  <a:srgbClr val="666666"/>
+                </a:solidFill>
+                <a:latin typeface="Calibri"/>
+              </a:defRPr>
+            </a:pPr>
+            <a:r>
+              <a:t>    Excepcion: funciones administrativas (bloquear, marcar) si endorsa.</a:t>
+            </a:r>
+          </a:p>
+          <a:p>
+            <a:pPr>
+              <a:spcAft>
+                <a:spcPts val="800"/>
+              </a:spcAft>
+              <a:defRPr sz="2000">
+                <a:solidFill>
+                  <a:srgbClr val="333333"/>
+                </a:solidFill>
+                <a:latin typeface="Calibri"/>
+              </a:defRPr>
+            </a:pPr>
+            <a:r>
+              <a:t>2. Identificar univocamente una factura:</a:t>
+            </a:r>
+          </a:p>
+          <a:p>
+            <a:pPr lvl="1">
+              <a:spcAft>
+                <a:spcPts val="400"/>
+              </a:spcAft>
+              <a:defRPr sz="1700">
+                <a:solidFill>
+                  <a:srgbClr val="666666"/>
+                </a:solidFill>
+                <a:latin typeface="Calibri"/>
+              </a:defRPr>
+            </a:pPr>
+            <a:r>
+              <a:t>    Hash SHA-256 del contenido de la factura (datos normalizados).</a:t>
+            </a:r>
+          </a:p>
+          <a:p>
+            <a:pPr lvl="1">
+              <a:spcAft>
+                <a:spcPts val="400"/>
+              </a:spcAft>
+              <a:defRPr sz="1700">
+                <a:solidFill>
+                  <a:srgbClr val="666666"/>
+                </a:solidFill>
+                <a:latin typeface="Calibri"/>
+              </a:defRPr>
+            </a:pPr>
+            <a:r>
+              <a:t>    El hash es unico, determinista y no revela el contenido.</a:t>
+            </a:r>
+          </a:p>
+          <a:p>
+            <a:pPr>
+              <a:spcAft>
+                <a:spcPts val="800"/>
+              </a:spcAft>
+              <a:defRPr sz="2000">
+                <a:solidFill>
+                  <a:srgbClr val="333333"/>
+                </a:solidFill>
+                <a:latin typeface="Calibri"/>
+              </a:defRPr>
+            </a:pPr>
+            <a:r>
+              <a:t>3. Datos personales on-chain (GDPR):</a:t>
+            </a:r>
+          </a:p>
+          <a:p>
+            <a:pPr lvl="1">
+              <a:spcAft>
+                <a:spcPts val="400"/>
+              </a:spcAft>
+              <a:defRPr sz="1700">
+                <a:solidFill>
+                  <a:srgbClr val="666666"/>
+                </a:solidFill>
+                <a:latin typeface="Calibri"/>
+              </a:defRPr>
+            </a:pPr>
+            <a:r>
+              <a:t>    NO guardar datos personales (nombres, DNIs, direcciones) on-chain.</a:t>
+            </a:r>
+          </a:p>
+          <a:p>
+            <a:pPr lvl="1">
+              <a:spcAft>
+                <a:spcPts val="400"/>
+              </a:spcAft>
+              <a:defRPr sz="1700">
+                <a:solidFill>
+                  <a:srgbClr val="666666"/>
+                </a:solidFill>
+                <a:latin typeface="Calibri"/>
+              </a:defRPr>
+            </a:pPr>
+            <a:r>
+              <a:t>    Guardar solo HASHES o IDs pseudonimos.</a:t>
+            </a:r>
+          </a:p>
+          <a:p>
+            <a:pPr lvl="1">
+              <a:spcAft>
+                <a:spcPts val="400"/>
+              </a:spcAft>
+              <a:defRPr sz="1700">
+                <a:solidFill>
+                  <a:srgbClr val="666666"/>
+                </a:solidFill>
+                <a:latin typeface="Calibri"/>
+              </a:defRPr>
+            </a:pPr>
+            <a:r>
+              <a:t>    Los datos reales van off-chain (BD tradicional de cada banco).</a:t>
+            </a:r>
+          </a:p>
+          <a:p>
+            <a:pPr>
+              <a:spcAft>
+                <a:spcPts val="800"/>
+              </a:spcAft>
+              <a:defRPr sz="2000">
+                <a:solidFill>
+                  <a:srgbClr val="333333"/>
+                </a:solidFill>
+                <a:latin typeface="Calibri"/>
+              </a:defRPr>
+            </a:pPr>
+            <a:r>
+              <a:t>4. ¿Regulador puede CONGELAR operaciones?</a:t>
+            </a:r>
+          </a:p>
+          <a:p>
+            <a:pPr lvl="1">
+              <a:spcAft>
+                <a:spcPts val="400"/>
+              </a:spcAft>
+              <a:defRPr sz="1700">
+                <a:solidFill>
+                  <a:srgbClr val="666666"/>
+                </a:solidFill>
+                <a:latin typeface="Calibri"/>
+              </a:defRPr>
+            </a:pPr>
+            <a:r>
+              <a:t>    Si, pero con garantias:</a:t>
+            </a:r>
+          </a:p>
+          <a:p>
+            <a:pPr lvl="1">
+              <a:spcAft>
+                <a:spcPts val="400"/>
+              </a:spcAft>
+              <a:defRPr sz="1700">
+                <a:solidFill>
+                  <a:srgbClr val="666666"/>
+                </a:solidFill>
+                <a:latin typeface="Calibri"/>
+              </a:defRPr>
+            </a:pPr>
+            <a:r>
+              <a:t>      - Evento de auditoria registrado (quien, cuando, por que)</a:t>
+            </a:r>
+          </a:p>
+          <a:p>
+            <a:pPr lvl="1">
+              <a:spcAft>
+                <a:spcPts val="400"/>
+              </a:spcAft>
+              <a:defRPr sz="1700">
+                <a:solidFill>
+                  <a:srgbClr val="666666"/>
+                </a:solidFill>
+                <a:latin typeface="Calibri"/>
+              </a:defRPr>
+            </a:pPr>
+            <a:r>
+              <a:t>      - Los bancos involucrados tienen derecho a apelar</a:t>
+            </a:r>
+          </a:p>
+          <a:p>
+            <a:pPr lvl="1">
+              <a:spcAft>
+                <a:spcPts val="400"/>
+              </a:spcAft>
+              <a:defRPr sz="1700">
+                <a:solidFill>
+                  <a:srgbClr val="666666"/>
+                </a:solidFill>
+                <a:latin typeface="Calibri"/>
+              </a:defRPr>
+            </a:pPr>
+            <a:r>
+              <a:t>      - Bloquear != confiscar; el estado del activo cambia, no desaparece.</a:t>
+            </a:r>
+          </a:p>
+          <a:p>
+            <a:pPr>
+              <a:spcAft>
+                <a:spcPts val="800"/>
+              </a:spcAft>
+              <a:defRPr sz="2000">
+                <a:solidFill>
+                  <a:srgbClr val="333333"/>
+                </a:solidFill>
+                <a:latin typeface="Calibri"/>
+              </a:defRPr>
+            </a:pPr>
+            <a:r>
+              <a:t>5. Si el cert del regulador es comprometido:</a:t>
+            </a:r>
+          </a:p>
+          <a:p>
+            <a:pPr lvl="1">
+              <a:spcAft>
+                <a:spcPts val="400"/>
+              </a:spcAft>
+              <a:defRPr sz="1700">
+                <a:solidFill>
+                  <a:srgbClr val="666666"/>
+                </a:solidFill>
+                <a:latin typeface="Calibri"/>
+              </a:defRPr>
+            </a:pPr>
+            <a:r>
+              <a:t>    Revocar el cert via Fabric CA + generar CRL + distribuir a peers.</a:t>
+            </a:r>
+          </a:p>
+          <a:p>
+            <a:pPr lvl="1">
+              <a:spcAft>
+                <a:spcPts val="400"/>
+              </a:spcAft>
+              <a:defRPr sz="1700">
+                <a:solidFill>
+                  <a:srgbClr val="666666"/>
+                </a:solidFill>
+                <a:latin typeface="Calibri"/>
+              </a:defRPr>
+            </a:pPr>
+            <a:r>
+              <a:t>    Hasta que los peers aplican la CRL, el cert comprometido es valido.</a:t>
+            </a:r>
+          </a:p>
+          <a:p>
+            <a:pPr lvl="1">
+              <a:spcAft>
+                <a:spcPts val="400"/>
+              </a:spcAft>
+              <a:defRPr sz="1700">
+                <a:solidFill>
+                  <a:srgbClr val="666666"/>
+                </a:solidFill>
+                <a:latin typeface="Calibri"/>
+              </a:defRPr>
+            </a:pPr>
+            <a:r>
+              <a:t>    Mitigacion: rotacion periodica + monitoreo de comportamiento anomalo.</a:t>
+            </a:r>
+          </a:p>
+          <a:p>
+            <a:pPr>
+              <a:spcAft>
+                <a:spcPts val="800"/>
+              </a:spcAft>
+              <a:defRPr sz="2000">
+                <a:solidFill>
+                  <a:srgbClr val="333333"/>
+                </a:solidFill>
+                <a:latin typeface="Calibri"/>
+              </a:defRPr>
+            </a:pPr>
+            <a:r>
+              <a:t>6. Rich query por invoiceHash: ¿LevelDB o CouchDB?</a:t>
+            </a:r>
+          </a:p>
+          <a:p>
+            <a:pPr lvl="1">
+              <a:spcAft>
+                <a:spcPts val="400"/>
+              </a:spcAft>
+              <a:defRPr sz="1700">
+                <a:solidFill>
+                  <a:srgbClr val="666666"/>
+                </a:solidFill>
+                <a:latin typeface="Calibri"/>
+              </a:defRPr>
+            </a:pPr>
+            <a:r>
+              <a:t>    LevelDB: rich queries NO funcionan, habria que escanear todo.</a:t>
+            </a:r>
+          </a:p>
+          <a:p>
+            <a:pPr lvl="1">
+              <a:spcAft>
+                <a:spcPts val="400"/>
+              </a:spcAft>
+              <a:defRPr sz="1700">
+                <a:solidFill>
+                  <a:srgbClr val="666666"/>
+                </a:solidFill>
+                <a:latin typeface="Calibri"/>
+              </a:defRPr>
+            </a:pPr>
+            <a:r>
+              <a:t>    CouchDB: indice por invoiceHash permite busqueda O(log n).</a:t>
+            </a:r>
+          </a:p>
+          <a:p>
+            <a:pPr lvl="1">
+              <a:spcAft>
+                <a:spcPts val="400"/>
+              </a:spcAft>
+              <a:defRPr sz="1700">
+                <a:solidFill>
+                  <a:srgbClr val="666666"/>
+                </a:solidFill>
+                <a:latin typeface="Calibri"/>
+              </a:defRPr>
+            </a:pPr>
+            <a:r>
+              <a:t>    Respuesta: CouchDB es IMPRESCINDIBLE para este caso de uso.</a:t>
+            </a:r>
+          </a:p>
+        </p:txBody>
+      </p:sp>
+    </p:spTree>
+  </p:cSld>
+  <p:clrMapOvr>
+    <a:masterClrMapping/>
+  </p:clrMapOvr>
+</p:sld>
+</file>
+
+<file path=ppt/slides/slide11.xml><?xml version="1.0" encoding="utf-8"?>
+<p:sld xmlns:a="http://schemas.openxmlformats.org/drawingml/2006/main" xmlns:p="http://schemas.openxmlformats.org/presentationml/2006/main" xmlns:r="http://schemas.openxmlformats.org/officeDocument/2006/relationships">
+  <p:cSld>
+    <p:spTree>
+      <p:nvGrpSpPr>
+        <p:cNvPr id="1" name=""/>
+        <p:cNvGrpSpPr/>
+        <p:nvPr/>
+      </p:nvGrpSpPr>
+      <p:grpSpPr/>
+      <p:sp>
+        <p:nvSpPr>
+          <p:cNvPr id="2" name="Rectangle 1"/>
+          <p:cNvSpPr/>
+          <p:nvPr/>
+        </p:nvSpPr>
+        <p:spPr>
+          <a:xfrm>
+            <a:off x="0" y="0"/>
+            <a:ext cx="12188952" cy="73152"/>
+          </a:xfrm>
+          <a:prstGeom prst="rect">
+            <a:avLst/>
+          </a:prstGeom>
+          <a:solidFill>
+            <a:srgbClr val="22627E"/>
+          </a:solidFill>
+          <a:ln>
+            <a:noFill/>
+          </a:ln>
+        </p:spPr>
+        <p:style>
+          <a:lnRef idx="1">
+            <a:schemeClr val="accent1"/>
+          </a:lnRef>
+          <a:fillRef idx="3">
+            <a:schemeClr val="accent1"/>
+          </a:fillRef>
+          <a:effectRef idx="2">
+            <a:schemeClr val="accent1"/>
+          </a:effectRef>
+          <a:fontRef idx="minor">
+            <a:schemeClr val="lt1"/>
+          </a:fontRef>
+        </p:style>
+        <p:txBody>
+          <a:bodyPr rtlCol="0" anchor="ctr"/>
+          <a:lstStyle/>
+          <a:p>
+            <a:pPr algn="ctr"/>
+          </a:p>
+        </p:txBody>
+      </p:sp>
+      <p:sp>
+        <p:nvSpPr>
+          <p:cNvPr id="3" name="TextBox 2"/>
+          <p:cNvSpPr txBox="1"/>
+          <p:nvPr/>
+        </p:nvSpPr>
+        <p:spPr>
+          <a:xfrm>
+            <a:off x="457200" y="274320"/>
+            <a:ext cx="10972800" cy="731520"/>
+          </a:xfrm>
+          <a:prstGeom prst="rect">
+            <a:avLst/>
+          </a:prstGeom>
+          <a:noFill/>
+        </p:spPr>
+        <p:txBody>
+          <a:bodyPr wrap="square"/>
+          <a:lstStyle/>
+          <a:p>
+            <a:pPr algn="l">
+              <a:defRPr sz="3200" b="1">
+                <a:solidFill>
+                  <a:srgbClr val="22627E"/>
+                </a:solidFill>
+                <a:latin typeface="Calibri"/>
+              </a:defRPr>
+            </a:pPr>
+            <a:r>
+              <a:t>Respuestas al debate</a:t>
+            </a:r>
+          </a:p>
+        </p:txBody>
+      </p:sp>
+      <p:sp>
+        <p:nvSpPr>
+          <p:cNvPr id="4" name="Rectangle 3"/>
+          <p:cNvSpPr/>
+          <p:nvPr/>
+        </p:nvSpPr>
+        <p:spPr>
+          <a:xfrm>
+            <a:off x="457200" y="1051560"/>
+            <a:ext cx="10972800" cy="27432"/>
+          </a:xfrm>
+          <a:prstGeom prst="rect">
+            <a:avLst/>
+          </a:prstGeom>
+          <a:solidFill>
+            <a:srgbClr val="22627E"/>
+          </a:solidFill>
+          <a:ln>
+            <a:noFill/>
+          </a:ln>
+        </p:spPr>
+        <p:style>
+          <a:lnRef idx="1">
+            <a:schemeClr val="accent1"/>
+          </a:lnRef>
+          <a:fillRef idx="3">
+            <a:schemeClr val="accent1"/>
+          </a:fillRef>
+          <a:effectRef idx="2">
+            <a:schemeClr val="accent1"/>
+          </a:effectRef>
+          <a:fontRef idx="minor">
+            <a:schemeClr val="lt1"/>
+          </a:fontRef>
+        </p:style>
+        <p:txBody>
+          <a:bodyPr rtlCol="0" anchor="ctr"/>
+          <a:lstStyle/>
+          <a:p>
+            <a:pPr algn="ctr"/>
+          </a:p>
+        </p:txBody>
+      </p:sp>
+      <p:sp>
+        <p:nvSpPr>
+          <p:cNvPr id="5" name="TextBox 4"/>
+          <p:cNvSpPr txBox="1"/>
+          <p:nvPr/>
+        </p:nvSpPr>
+        <p:spPr>
+          <a:xfrm>
+            <a:off x="640080" y="1280160"/>
+            <a:ext cx="10515600" cy="5029200"/>
+          </a:xfrm>
+          <a:prstGeom prst="rect">
+            <a:avLst/>
+          </a:prstGeom>
+          <a:noFill/>
+        </p:spPr>
+        <p:txBody>
+          <a:bodyPr wrap="square">
+            <a:spAutoFit/>
+          </a:bodyPr>
+          <a:lstStyle/>
+          <a:p>
+            <a:pPr>
+              <a:spcAft>
+                <a:spcPts val="800"/>
+              </a:spcAft>
+              <a:defRPr sz="2000">
+                <a:solidFill>
+                  <a:srgbClr val="333333"/>
+                </a:solidFill>
+                <a:latin typeface="Calibri"/>
+              </a:defRPr>
+            </a:pPr>
+            <a:r>
+              <a:t>1. ¿Regulador en el consorcio o acceso via API?</a:t>
+            </a:r>
+          </a:p>
+          <a:p>
+            <a:pPr lvl="1">
+              <a:spcAft>
+                <a:spcPts val="400"/>
+              </a:spcAft>
+              <a:defRPr sz="1700">
+                <a:solidFill>
+                  <a:srgbClr val="666666"/>
+                </a:solidFill>
+                <a:latin typeface="Calibri"/>
+              </a:defRPr>
+            </a:pPr>
+            <a:r>
+              <a:t>    En el consorcio = supervision en tiempo real, deteccion inmediata.</a:t>
+            </a:r>
+          </a:p>
+          <a:p>
+            <a:pPr lvl="1">
+              <a:spcAft>
+                <a:spcPts val="400"/>
+              </a:spcAft>
+              <a:defRPr sz="1700">
+                <a:solidFill>
+                  <a:srgbClr val="666666"/>
+                </a:solidFill>
+                <a:latin typeface="Calibri"/>
+              </a:defRPr>
+            </a:pPr>
+            <a:r>
+              <a:t>    Via API = mas control de acceso, menos intrusivo, mas lento.</a:t>
+            </a:r>
+          </a:p>
+          <a:p>
+            <a:pPr lvl="1">
+              <a:spcAft>
+                <a:spcPts val="400"/>
+              </a:spcAft>
+              <a:defRPr sz="1700">
+                <a:solidFill>
+                  <a:srgbClr val="666666"/>
+                </a:solidFill>
+                <a:latin typeface="Calibri"/>
+              </a:defRPr>
+            </a:pPr>
+            <a:r>
+              <a:t>    Lo correcto depende del nivel de confianza y del marco legal local.</a:t>
+            </a:r>
+          </a:p>
+          <a:p>
+            <a:pPr>
+              <a:spcAft>
+                <a:spcPts val="800"/>
+              </a:spcAft>
+              <a:defRPr sz="2000">
+                <a:solidFill>
+                  <a:srgbClr val="333333"/>
+                </a:solidFill>
+                <a:latin typeface="Calibri"/>
+              </a:defRPr>
+            </a:pPr>
+            <a:r>
+              <a:t>2. En Europa, ¿BCE o banco central nacional?</a:t>
+            </a:r>
+          </a:p>
+          <a:p>
+            <a:pPr lvl="1">
+              <a:spcAft>
+                <a:spcPts val="400"/>
+              </a:spcAft>
+              <a:defRPr sz="1700">
+                <a:solidFill>
+                  <a:srgbClr val="666666"/>
+                </a:solidFill>
+                <a:latin typeface="Calibri"/>
+              </a:defRPr>
+            </a:pPr>
+            <a:r>
+              <a:t>    BCE a nivel europeo — operaciones transfronterizas.</a:t>
+            </a:r>
+          </a:p>
+          <a:p>
+            <a:pPr lvl="1">
+              <a:spcAft>
+                <a:spcPts val="400"/>
+              </a:spcAft>
+              <a:defRPr sz="1700">
+                <a:solidFill>
+                  <a:srgbClr val="666666"/>
+                </a:solidFill>
+                <a:latin typeface="Calibri"/>
+              </a:defRPr>
+            </a:pPr>
+            <a:r>
+              <a:t>    Banco central nacional para operaciones domesticas (p.ej. Banco de Espana).</a:t>
+            </a:r>
+          </a:p>
+          <a:p>
+            <a:pPr lvl="1">
+              <a:spcAft>
+                <a:spcPts val="400"/>
+              </a:spcAft>
+              <a:defRPr sz="1700">
+                <a:solidFill>
+                  <a:srgbClr val="666666"/>
+                </a:solidFill>
+                <a:latin typeface="Calibri"/>
+              </a:defRPr>
+            </a:pPr>
+            <a:r>
+              <a:t>    Modelo hibrido: federacion de bancos centrales (similar a EBSI).</a:t>
+            </a:r>
+          </a:p>
+          <a:p>
+            <a:pPr>
+              <a:spcAft>
+                <a:spcPts val="800"/>
+              </a:spcAft>
+              <a:defRPr sz="2000">
+                <a:solidFill>
+                  <a:srgbClr val="333333"/>
+                </a:solidFill>
+                <a:latin typeface="Calibri"/>
+              </a:defRPr>
+            </a:pPr>
+            <a:r>
+              <a:t>3. ¿Regulador con acceso total es privacy-friendly?</a:t>
+            </a:r>
+          </a:p>
+          <a:p>
+            <a:pPr lvl="1">
+              <a:spcAft>
+                <a:spcPts val="400"/>
+              </a:spcAft>
+              <a:defRPr sz="1700">
+                <a:solidFill>
+                  <a:srgbClr val="666666"/>
+                </a:solidFill>
+                <a:latin typeface="Calibri"/>
+              </a:defRPr>
+            </a:pPr>
+            <a:r>
+              <a:t>    No es privacy-friendly por naturaleza, pero SI es 'auditoria razonable'.</a:t>
+            </a:r>
+          </a:p>
+          <a:p>
+            <a:pPr lvl="1">
+              <a:spcAft>
+                <a:spcPts val="400"/>
+              </a:spcAft>
+              <a:defRPr sz="1700">
+                <a:solidFill>
+                  <a:srgbClr val="666666"/>
+                </a:solidFill>
+                <a:latin typeface="Calibri"/>
+              </a:defRPr>
+            </a:pPr>
+            <a:r>
+              <a:t>    El regulador ya tiene acceso legal a esta informacion (aunque mas lento).</a:t>
+            </a:r>
+          </a:p>
+          <a:p>
+            <a:pPr lvl="1">
+              <a:spcAft>
+                <a:spcPts val="400"/>
+              </a:spcAft>
+              <a:defRPr sz="1700">
+                <a:solidFill>
+                  <a:srgbClr val="666666"/>
+                </a:solidFill>
+                <a:latin typeface="Calibri"/>
+              </a:defRPr>
+            </a:pPr>
+            <a:r>
+              <a:t>    Clave: que sea PROPORCIONAL y AUDITABLE (acceso justificado y registrado).</a:t>
+            </a:r>
+          </a:p>
+          <a:p>
+            <a:pPr>
+              <a:spcAft>
+                <a:spcPts val="800"/>
+              </a:spcAft>
+              <a:defRPr sz="2000">
+                <a:solidFill>
+                  <a:srgbClr val="333333"/>
+                </a:solidFill>
+                <a:latin typeface="Calibri"/>
+              </a:defRPr>
+            </a:pPr>
+            <a:r>
+              <a:t>4. Si el regulador es comprometido:</a:t>
+            </a:r>
+          </a:p>
+          <a:p>
+            <a:pPr lvl="1">
+              <a:spcAft>
+                <a:spcPts val="400"/>
+              </a:spcAft>
+              <a:defRPr sz="1700">
+                <a:solidFill>
+                  <a:srgbClr val="666666"/>
+                </a:solidFill>
+                <a:latin typeface="Calibri"/>
+              </a:defRPr>
+            </a:pPr>
+            <a:r>
+              <a:t>    Grave — el regulador tiene visibilidad total de operaciones.</a:t>
+            </a:r>
+          </a:p>
+          <a:p>
+            <a:pPr lvl="1">
+              <a:spcAft>
+                <a:spcPts val="400"/>
+              </a:spcAft>
+              <a:defRPr sz="1700">
+                <a:solidFill>
+                  <a:srgbClr val="666666"/>
+                </a:solidFill>
+                <a:latin typeface="Calibri"/>
+              </a:defRPr>
+            </a:pPr>
+            <a:r>
+              <a:t>    Requiere: rotacion frecuente de cert, HSM para la clave privada,</a:t>
+            </a:r>
+          </a:p>
+          <a:p>
+            <a:pPr lvl="1">
+              <a:spcAft>
+                <a:spcPts val="400"/>
+              </a:spcAft>
+              <a:defRPr sz="1700">
+                <a:solidFill>
+                  <a:srgbClr val="666666"/>
+                </a:solidFill>
+                <a:latin typeface="Calibri"/>
+              </a:defRPr>
+            </a:pPr>
+            <a:r>
+              <a:t>    multi-factor para operaciones sensibles, auditoria de los accesos del regulador.</a:t>
+            </a:r>
+          </a:p>
+          <a:p>
+            <a:pPr>
+              <a:spcAft>
+                <a:spcPts val="800"/>
+              </a:spcAft>
+              <a:defRPr sz="2000">
+                <a:solidFill>
+                  <a:srgbClr val="333333"/>
+                </a:solidFill>
+                <a:latin typeface="Calibri"/>
+              </a:defRPr>
+            </a:pPr>
+            <a:r>
+              <a:t>5. ¿Puede un banco oponerse a una marca del regulador?</a:t>
+            </a:r>
+          </a:p>
+          <a:p>
+            <a:pPr lvl="1">
+              <a:spcAft>
+                <a:spcPts val="400"/>
+              </a:spcAft>
+              <a:defRPr sz="1700">
+                <a:solidFill>
+                  <a:srgbClr val="666666"/>
+                </a:solidFill>
+                <a:latin typeface="Calibri"/>
+              </a:defRPr>
+            </a:pPr>
+            <a:r>
+              <a:t>    Legalmente: via tribunales (el regulador tiene autoridad limitada).</a:t>
+            </a:r>
+          </a:p>
+          <a:p>
+            <a:pPr lvl="1">
+              <a:spcAft>
+                <a:spcPts val="400"/>
+              </a:spcAft>
+              <a:defRPr sz="1700">
+                <a:solidFill>
+                  <a:srgbClr val="666666"/>
+                </a:solidFill>
+                <a:latin typeface="Calibri"/>
+              </a:defRPr>
+            </a:pPr>
+            <a:r>
+              <a:t>    Tecnicamente: NO dentro del chaincode (la politica lo rechaza).</a:t>
+            </a:r>
+          </a:p>
+          <a:p>
+            <a:pPr lvl="1">
+              <a:spcAft>
+                <a:spcPts val="400"/>
+              </a:spcAft>
+              <a:defRPr sz="1700">
+                <a:solidFill>
+                  <a:srgbClr val="666666"/>
+                </a:solidFill>
+                <a:latin typeface="Calibri"/>
+              </a:defRPr>
+            </a:pPr>
+            <a:r>
+              <a:t>    El banco puede solicitar revision, pero la operacion queda marcada hasta aclarar.</a:t>
             </a:r>
           </a:p>
         </p:txBody>
